--- a/assets/pptx/catalog-758.pptx
+++ b/assets/pptx/catalog-758.pptx
@@ -3260,7 +3260,7 @@
                 <a:ea typeface="Ebrima"/>
                 <a:cs typeface="Ebrima"/>
               </a:rPr>
-              <a:t>እጅግ ደስተኞች ሆንን (2x)</a:t>
+              <a:t>እጅግ ደስተኞች ሆንን 2x</a:t>
             </a:r>
           </a:p>
           <a:p>
@@ -3399,7 +3399,7 @@
                 <a:ea typeface="Ebrima"/>
                 <a:cs typeface="Ebrima"/>
               </a:rPr>
-              <a:t>ክብር ይገባዋል (2x)</a:t>
+              <a:t>ክብር ይገባዋል 2x</a:t>
             </a:r>
           </a:p>
           <a:p>
